--- a/viewers/pptx/e2e/fixtures/parity-wave4.pptx
+++ b/viewers/pptx/e2e/fixtures/parity-wave4.pptx
@@ -26,7 +26,7 @@
       </a:defRPr>
     </a:lvl1pPr>
   </p:defaultTextStyle>
-  <p:modifyVerifier cryptProviderType="rsaAES" cryptAlgorithmClass="hash" cryptAlgorithmType="typeAny" cryptAlgorithmSid="14" spinCount="100000" saltData="Zm9v" hashData="YmFy"/>
+  <p:modifyVerifier cryptProviderType="rsaAES" cryptAlgorithmClass="hash" cryptAlgorithmType="typeAny" spinCount="100000" saltData="Zm9v" hashData="YmFy"/>
   <p:wave4Unmodelled/>
 </p:presentation>
 </file>

--- a/viewers/pptx/e2e/fixtures/parity-wave4.pptx
+++ b/viewers/pptx/e2e/fixtures/parity-wave4.pptx
@@ -511,7 +511,7 @@
       </p:grpSpPr>
       <p:sp>
         <p:nvSpPr>
-          <p:cNvPr id="3" name="TextBox 3"/>
+          <p:cNvPr id="2" name="TextBox 3"/>
           <p:cNvSpPr txBox="1"/>
           <p:nvPr/>
         </p:nvSpPr>

--- a/viewers/pptx/e2e/fixtures/parity-wave4.pptx
+++ b/viewers/pptx/e2e/fixtures/parity-wave4.pptx
@@ -422,12 +422,10 @@
           <a:bodyPr wrap="square"/>
           <a:lstStyle/>
           <a:p>
-            <a:pPr/>
             <a:r>
               <a:rPr lang="en-US" dirty="0"/>
               <a:t>WAVE4-SLIDE-ONE</a:t>
             </a:r>
-            <a:endParaRPr lang="en-US"/>
           </a:p>
         </p:txBody>
       </p:sp>
@@ -475,12 +473,10 @@
           <a:bodyPr wrap="square"/>
           <a:lstStyle/>
           <a:p>
-            <a:pPr/>
             <a:r>
               <a:rPr lang="en-US" dirty="0"/>
               <a:t>WAVE4-SLIDE-TWO</a:t>
             </a:r>
-            <a:endParaRPr lang="en-US"/>
           </a:p>
         </p:txBody>
       </p:sp>
@@ -528,12 +524,10 @@
           <a:bodyPr wrap="square"/>
           <a:lstStyle/>
           <a:p>
-            <a:pPr/>
             <a:r>
               <a:rPr lang="en-US" dirty="0"/>
               <a:t>WAVE4-SLIDE-THREE</a:t>
             </a:r>
-            <a:endParaRPr lang="en-US"/>
           </a:p>
         </p:txBody>
       </p:sp>
